--- a/1_Class/Slides/INFO4610-Session2.pptx
+++ b/1_Class/Slides/INFO4610-Session2.pptx
@@ -472,1266 +472,6 @@
     </a:lvl9pPr>
   </p:notesStyle>
 </p:notesMaster>
-</file>
-
-<file path=ppt/notesSlides/notesSlide1.xml><?xml version="1.0" encoding="utf-8"?>
-<p:notes xmlns:a="http://schemas.openxmlformats.org/drawingml/2006/main" xmlns:p="http://schemas.openxmlformats.org/presentationml/2006/main" xmlns:r="http://schemas.openxmlformats.org/officeDocument/2006/relationships">
-  <p:cSld>
-    <p:spTree>
-      <p:nvGrpSpPr>
-        <p:cNvPr id="1" name=""/>
-        <p:cNvGrpSpPr/>
-        <p:nvPr/>
-      </p:nvGrpSpPr>
-      <p:grpSpPr>
-        <a:xfrm>
-          <a:off x="0" y="0"/>
-          <a:ext cx="0" cy="0"/>
-          <a:chOff x="0" y="0"/>
-          <a:chExt cx="0" cy="0"/>
-        </a:xfrm>
-      </p:grpSpPr>
-      <p:sp>
-        <p:nvSpPr>
-          <p:cNvPr id="2" name="Slide Image Placeholder 1"/>
-          <p:cNvSpPr>
-            <a:spLocks noGrp="1"/>
-          </p:cNvSpPr>
-          <p:nvPr>
-            <p:ph type="sldImg" idx="2"/>
-          </p:nvPr>
-        </p:nvSpPr>
-        <p:spPr/>
-      </p:sp>
-      <p:sp>
-        <p:nvSpPr>
-          <p:cNvPr id="3" name="Notes Placeholder 2"/>
-          <p:cNvSpPr>
-            <a:spLocks noGrp="1"/>
-          </p:cNvSpPr>
-          <p:nvPr>
-            <p:ph type="body" idx="3" sz="quarter"/>
-          </p:nvPr>
-        </p:nvSpPr>
-        <p:spPr/>
-        <p:txBody>
-          <a:bodyPr/>
-          <a:lstStyle/>
-          <a:p>
-            <a:r>
-              <a:t>Tonight is mostly hands on. About 60 minutes of building, then we shift to the part that decides whether any of it matters: getting a decision-maker to act.</a:t>
-            </a:r>
-          </a:p>
-        </p:txBody>
-      </p:sp>
-      <p:sp>
-        <p:nvSpPr>
-          <p:cNvPr id="4" name="Slide Number Placeholder 3"/>
-          <p:cNvSpPr>
-            <a:spLocks noGrp="1"/>
-          </p:cNvSpPr>
-          <p:nvPr>
-            <p:ph type="sldNum" idx="5" sz="quarter"/>
-          </p:nvPr>
-        </p:nvSpPr>
-        <p:spPr/>
-      </p:sp>
-    </p:spTree>
-  </p:cSld>
-  <p:clrMapOvr>
-    <a:masterClrMapping/>
-  </p:clrMapOvr>
-</p:notes>
-</file>
-
-<file path=ppt/notesSlides/notesSlide10.xml><?xml version="1.0" encoding="utf-8"?>
-<p:notes xmlns:a="http://schemas.openxmlformats.org/drawingml/2006/main" xmlns:p="http://schemas.openxmlformats.org/presentationml/2006/main" xmlns:r="http://schemas.openxmlformats.org/officeDocument/2006/relationships">
-  <p:cSld>
-    <p:spTree>
-      <p:nvGrpSpPr>
-        <p:cNvPr id="1" name=""/>
-        <p:cNvGrpSpPr/>
-        <p:nvPr/>
-      </p:nvGrpSpPr>
-      <p:grpSpPr>
-        <a:xfrm>
-          <a:off x="0" y="0"/>
-          <a:ext cx="0" cy="0"/>
-          <a:chOff x="0" y="0"/>
-          <a:chExt cx="0" cy="0"/>
-        </a:xfrm>
-      </p:grpSpPr>
-      <p:sp>
-        <p:nvSpPr>
-          <p:cNvPr id="2" name="Slide Image Placeholder 1"/>
-          <p:cNvSpPr>
-            <a:spLocks noGrp="1"/>
-          </p:cNvSpPr>
-          <p:nvPr>
-            <p:ph type="sldImg" idx="2"/>
-          </p:nvPr>
-        </p:nvSpPr>
-        <p:spPr/>
-      </p:sp>
-      <p:sp>
-        <p:nvSpPr>
-          <p:cNvPr id="3" name="Notes Placeholder 2"/>
-          <p:cNvSpPr>
-            <a:spLocks noGrp="1"/>
-          </p:cNvSpPr>
-          <p:nvPr>
-            <p:ph type="body" idx="3" sz="quarter"/>
-          </p:nvPr>
-        </p:nvSpPr>
-        <p:spPr/>
-        <p:txBody>
-          <a:bodyPr/>
-          <a:lstStyle/>
-          <a:p>
-            <a:r>
-              <a:t>The shift in the room here is real. Most people find the memo harder than the build, and are surprised by that.</a:t>
-            </a:r>
-          </a:p>
-        </p:txBody>
-      </p:sp>
-      <p:sp>
-        <p:nvSpPr>
-          <p:cNvPr id="4" name="Slide Number Placeholder 3"/>
-          <p:cNvSpPr>
-            <a:spLocks noGrp="1"/>
-          </p:cNvSpPr>
-          <p:nvPr>
-            <p:ph type="sldNum" idx="5" sz="quarter"/>
-          </p:nvPr>
-        </p:nvSpPr>
-        <p:spPr/>
-      </p:sp>
-    </p:spTree>
-  </p:cSld>
-  <p:clrMapOvr>
-    <a:masterClrMapping/>
-  </p:clrMapOvr>
-</p:notes>
-</file>
-
-<file path=ppt/notesSlides/notesSlide11.xml><?xml version="1.0" encoding="utf-8"?>
-<p:notes xmlns:a="http://schemas.openxmlformats.org/drawingml/2006/main" xmlns:p="http://schemas.openxmlformats.org/presentationml/2006/main" xmlns:r="http://schemas.openxmlformats.org/officeDocument/2006/relationships">
-  <p:cSld>
-    <p:spTree>
-      <p:nvGrpSpPr>
-        <p:cNvPr id="1" name=""/>
-        <p:cNvGrpSpPr/>
-        <p:nvPr/>
-      </p:nvGrpSpPr>
-      <p:grpSpPr>
-        <a:xfrm>
-          <a:off x="0" y="0"/>
-          <a:ext cx="0" cy="0"/>
-          <a:chOff x="0" y="0"/>
-          <a:chExt cx="0" cy="0"/>
-        </a:xfrm>
-      </p:grpSpPr>
-      <p:sp>
-        <p:nvSpPr>
-          <p:cNvPr id="2" name="Slide Image Placeholder 1"/>
-          <p:cNvSpPr>
-            <a:spLocks noGrp="1"/>
-          </p:cNvSpPr>
-          <p:nvPr>
-            <p:ph type="sldImg" idx="2"/>
-          </p:nvPr>
-        </p:nvSpPr>
-        <p:spPr/>
-      </p:sp>
-      <p:sp>
-        <p:nvSpPr>
-          <p:cNvPr id="3" name="Notes Placeholder 2"/>
-          <p:cNvSpPr>
-            <a:spLocks noGrp="1"/>
-          </p:cNvSpPr>
-          <p:nvPr>
-            <p:ph type="body" idx="3" sz="quarter"/>
-          </p:nvPr>
-        </p:nvSpPr>
-        <p:spPr/>
-        <p:txBody>
-          <a:bodyPr/>
-          <a:lstStyle/>
-          <a:p>
-            <a:r>
-              <a:t>Most people write memos in the order the work happened. That is the instinct to break tonight.</a:t>
-            </a:r>
-          </a:p>
-        </p:txBody>
-      </p:sp>
-      <p:sp>
-        <p:nvSpPr>
-          <p:cNvPr id="4" name="Slide Number Placeholder 3"/>
-          <p:cNvSpPr>
-            <a:spLocks noGrp="1"/>
-          </p:cNvSpPr>
-          <p:nvPr>
-            <p:ph type="sldNum" idx="5" sz="quarter"/>
-          </p:nvPr>
-        </p:nvSpPr>
-        <p:spPr/>
-      </p:sp>
-    </p:spTree>
-  </p:cSld>
-  <p:clrMapOvr>
-    <a:masterClrMapping/>
-  </p:clrMapOvr>
-</p:notes>
-</file>
-
-<file path=ppt/notesSlides/notesSlide12.xml><?xml version="1.0" encoding="utf-8"?>
-<p:notes xmlns:a="http://schemas.openxmlformats.org/drawingml/2006/main" xmlns:p="http://schemas.openxmlformats.org/presentationml/2006/main" xmlns:r="http://schemas.openxmlformats.org/officeDocument/2006/relationships">
-  <p:cSld>
-    <p:spTree>
-      <p:nvGrpSpPr>
-        <p:cNvPr id="1" name=""/>
-        <p:cNvGrpSpPr/>
-        <p:nvPr/>
-      </p:nvGrpSpPr>
-      <p:grpSpPr>
-        <a:xfrm>
-          <a:off x="0" y="0"/>
-          <a:ext cx="0" cy="0"/>
-          <a:chOff x="0" y="0"/>
-          <a:chExt cx="0" cy="0"/>
-        </a:xfrm>
-      </p:grpSpPr>
-      <p:sp>
-        <p:nvSpPr>
-          <p:cNvPr id="2" name="Slide Image Placeholder 1"/>
-          <p:cNvSpPr>
-            <a:spLocks noGrp="1"/>
-          </p:cNvSpPr>
-          <p:nvPr>
-            <p:ph type="sldImg" idx="2"/>
-          </p:nvPr>
-        </p:nvSpPr>
-        <p:spPr/>
-      </p:sp>
-      <p:sp>
-        <p:nvSpPr>
-          <p:cNvPr id="3" name="Notes Placeholder 2"/>
-          <p:cNvSpPr>
-            <a:spLocks noGrp="1"/>
-          </p:cNvSpPr>
-          <p:nvPr>
-            <p:ph type="body" idx="3" sz="quarter"/>
-          </p:nvPr>
-        </p:nvSpPr>
-        <p:spPr/>
-        <p:txBody>
-          <a:bodyPr/>
-          <a:lstStyle/>
-          <a:p>
-            <a:r>
-              <a:t>Read both aloud. The left one sounds more thorough and is worth less. That contrast does more teaching than any rule.</a:t>
-            </a:r>
-          </a:p>
-        </p:txBody>
-      </p:sp>
-      <p:sp>
-        <p:nvSpPr>
-          <p:cNvPr id="4" name="Slide Number Placeholder 3"/>
-          <p:cNvSpPr>
-            <a:spLocks noGrp="1"/>
-          </p:cNvSpPr>
-          <p:nvPr>
-            <p:ph type="sldNum" idx="5" sz="quarter"/>
-          </p:nvPr>
-        </p:nvSpPr>
-        <p:spPr/>
-      </p:sp>
-    </p:spTree>
-  </p:cSld>
-  <p:clrMapOvr>
-    <a:masterClrMapping/>
-  </p:clrMapOvr>
-</p:notes>
-</file>
-
-<file path=ppt/notesSlides/notesSlide13.xml><?xml version="1.0" encoding="utf-8"?>
-<p:notes xmlns:a="http://schemas.openxmlformats.org/drawingml/2006/main" xmlns:p="http://schemas.openxmlformats.org/presentationml/2006/main" xmlns:r="http://schemas.openxmlformats.org/officeDocument/2006/relationships">
-  <p:cSld>
-    <p:spTree>
-      <p:nvGrpSpPr>
-        <p:cNvPr id="1" name=""/>
-        <p:cNvGrpSpPr/>
-        <p:nvPr/>
-      </p:nvGrpSpPr>
-      <p:grpSpPr>
-        <a:xfrm>
-          <a:off x="0" y="0"/>
-          <a:ext cx="0" cy="0"/>
-          <a:chOff x="0" y="0"/>
-          <a:chExt cx="0" cy="0"/>
-        </a:xfrm>
-      </p:grpSpPr>
-      <p:sp>
-        <p:nvSpPr>
-          <p:cNvPr id="2" name="Slide Image Placeholder 1"/>
-          <p:cNvSpPr>
-            <a:spLocks noGrp="1"/>
-          </p:cNvSpPr>
-          <p:nvPr>
-            <p:ph type="sldImg" idx="2"/>
-          </p:nvPr>
-        </p:nvSpPr>
-        <p:spPr/>
-      </p:sp>
-      <p:sp>
-        <p:nvSpPr>
-          <p:cNvPr id="3" name="Notes Placeholder 2"/>
-          <p:cNvSpPr>
-            <a:spLocks noGrp="1"/>
-          </p:cNvSpPr>
-          <p:nvPr>
-            <p:ph type="body" idx="3" sz="quarter"/>
-          </p:nvPr>
-        </p:nvSpPr>
-        <p:spPr/>
-        <p:txBody>
-          <a:bodyPr/>
-          <a:lstStyle/>
-          <a:p>
-            <a:r>
-              <a:t>This is counterintuitive and it is the most transferable thing in the session. It applies to every memo they will ever write.</a:t>
-            </a:r>
-          </a:p>
-        </p:txBody>
-      </p:sp>
-      <p:sp>
-        <p:nvSpPr>
-          <p:cNvPr id="4" name="Slide Number Placeholder 3"/>
-          <p:cNvSpPr>
-            <a:spLocks noGrp="1"/>
-          </p:cNvSpPr>
-          <p:nvPr>
-            <p:ph type="sldNum" idx="5" sz="quarter"/>
-          </p:nvPr>
-        </p:nvSpPr>
-        <p:spPr/>
-      </p:sp>
-    </p:spTree>
-  </p:cSld>
-  <p:clrMapOvr>
-    <a:masterClrMapping/>
-  </p:clrMapOvr>
-</p:notes>
-</file>
-
-<file path=ppt/notesSlides/notesSlide14.xml><?xml version="1.0" encoding="utf-8"?>
-<p:notes xmlns:a="http://schemas.openxmlformats.org/drawingml/2006/main" xmlns:p="http://schemas.openxmlformats.org/presentationml/2006/main" xmlns:r="http://schemas.openxmlformats.org/officeDocument/2006/relationships">
-  <p:cSld>
-    <p:spTree>
-      <p:nvGrpSpPr>
-        <p:cNvPr id="1" name=""/>
-        <p:cNvGrpSpPr/>
-        <p:nvPr/>
-      </p:nvGrpSpPr>
-      <p:grpSpPr>
-        <a:xfrm>
-          <a:off x="0" y="0"/>
-          <a:ext cx="0" cy="0"/>
-          <a:chOff x="0" y="0"/>
-          <a:chExt cx="0" cy="0"/>
-        </a:xfrm>
-      </p:grpSpPr>
-      <p:sp>
-        <p:nvSpPr>
-          <p:cNvPr id="2" name="Slide Image Placeholder 1"/>
-          <p:cNvSpPr>
-            <a:spLocks noGrp="1"/>
-          </p:cNvSpPr>
-          <p:nvPr>
-            <p:ph type="sldImg" idx="2"/>
-          </p:nvPr>
-        </p:nvSpPr>
-        <p:spPr/>
-      </p:sp>
-      <p:sp>
-        <p:nvSpPr>
-          <p:cNvPr id="3" name="Notes Placeholder 2"/>
-          <p:cNvSpPr>
-            <a:spLocks noGrp="1"/>
-          </p:cNvSpPr>
-          <p:nvPr>
-            <p:ph type="body" idx="3" sz="quarter"/>
-          </p:nvPr>
-        </p:nvSpPr>
-        <p:spPr/>
-        <p:txBody>
-          <a:bodyPr/>
-          <a:lstStyle/>
-          <a:p>
-            <a:r>
-              <a:t>The forward test is the one that changes behavior. Ask them to imagine the postmortem meeting.</a:t>
-            </a:r>
-          </a:p>
-        </p:txBody>
-      </p:sp>
-      <p:sp>
-        <p:nvSpPr>
-          <p:cNvPr id="4" name="Slide Number Placeholder 3"/>
-          <p:cNvSpPr>
-            <a:spLocks noGrp="1"/>
-          </p:cNvSpPr>
-          <p:nvPr>
-            <p:ph type="sldNum" idx="5" sz="quarter"/>
-          </p:nvPr>
-        </p:nvSpPr>
-        <p:spPr/>
-      </p:sp>
-    </p:spTree>
-  </p:cSld>
-  <p:clrMapOvr>
-    <a:masterClrMapping/>
-  </p:clrMapOvr>
-</p:notes>
-</file>
-
-<file path=ppt/notesSlides/notesSlide15.xml><?xml version="1.0" encoding="utf-8"?>
-<p:notes xmlns:a="http://schemas.openxmlformats.org/drawingml/2006/main" xmlns:p="http://schemas.openxmlformats.org/presentationml/2006/main" xmlns:r="http://schemas.openxmlformats.org/officeDocument/2006/relationships">
-  <p:cSld>
-    <p:spTree>
-      <p:nvGrpSpPr>
-        <p:cNvPr id="1" name=""/>
-        <p:cNvGrpSpPr/>
-        <p:nvPr/>
-      </p:nvGrpSpPr>
-      <p:grpSpPr>
-        <a:xfrm>
-          <a:off x="0" y="0"/>
-          <a:ext cx="0" cy="0"/>
-          <a:chOff x="0" y="0"/>
-          <a:chExt cx="0" cy="0"/>
-        </a:xfrm>
-      </p:grpSpPr>
-      <p:sp>
-        <p:nvSpPr>
-          <p:cNvPr id="2" name="Slide Image Placeholder 1"/>
-          <p:cNvSpPr>
-            <a:spLocks noGrp="1"/>
-          </p:cNvSpPr>
-          <p:nvPr>
-            <p:ph type="sldImg" idx="2"/>
-          </p:nvPr>
-        </p:nvSpPr>
-        <p:spPr/>
-      </p:sp>
-      <p:sp>
-        <p:nvSpPr>
-          <p:cNvPr id="3" name="Notes Placeholder 2"/>
-          <p:cNvSpPr>
-            <a:spLocks noGrp="1"/>
-          </p:cNvSpPr>
-          <p:nvPr>
-            <p:ph type="body" idx="3" sz="quarter"/>
-          </p:nvPr>
-        </p:nvSpPr>
-        <p:spPr/>
-        <p:txBody>
-          <a:bodyPr/>
-          <a:lstStyle/>
-          <a:p>
-            <a:r>
-              <a:t>Twelve minutes in, ask three people to read their first paragraph aloud. The room learns more from that than from the slide.</a:t>
-            </a:r>
-          </a:p>
-        </p:txBody>
-      </p:sp>
-      <p:sp>
-        <p:nvSpPr>
-          <p:cNvPr id="4" name="Slide Number Placeholder 3"/>
-          <p:cNvSpPr>
-            <a:spLocks noGrp="1"/>
-          </p:cNvSpPr>
-          <p:nvPr>
-            <p:ph type="sldNum" idx="5" sz="quarter"/>
-          </p:nvPr>
-        </p:nvSpPr>
-        <p:spPr/>
-      </p:sp>
-    </p:spTree>
-  </p:cSld>
-  <p:clrMapOvr>
-    <a:masterClrMapping/>
-  </p:clrMapOvr>
-</p:notes>
-</file>
-
-<file path=ppt/notesSlides/notesSlide16.xml><?xml version="1.0" encoding="utf-8"?>
-<p:notes xmlns:a="http://schemas.openxmlformats.org/drawingml/2006/main" xmlns:p="http://schemas.openxmlformats.org/presentationml/2006/main" xmlns:r="http://schemas.openxmlformats.org/officeDocument/2006/relationships">
-  <p:cSld>
-    <p:spTree>
-      <p:nvGrpSpPr>
-        <p:cNvPr id="1" name=""/>
-        <p:cNvGrpSpPr/>
-        <p:nvPr/>
-      </p:nvGrpSpPr>
-      <p:grpSpPr>
-        <a:xfrm>
-          <a:off x="0" y="0"/>
-          <a:ext cx="0" cy="0"/>
-          <a:chOff x="0" y="0"/>
-          <a:chExt cx="0" cy="0"/>
-        </a:xfrm>
-      </p:grpSpPr>
-      <p:sp>
-        <p:nvSpPr>
-          <p:cNvPr id="2" name="Slide Image Placeholder 1"/>
-          <p:cNvSpPr>
-            <a:spLocks noGrp="1"/>
-          </p:cNvSpPr>
-          <p:nvPr>
-            <p:ph type="sldImg" idx="2"/>
-          </p:nvPr>
-        </p:nvSpPr>
-        <p:spPr/>
-      </p:sp>
-      <p:sp>
-        <p:nvSpPr>
-          <p:cNvPr id="3" name="Notes Placeholder 2"/>
-          <p:cNvSpPr>
-            <a:spLocks noGrp="1"/>
-          </p:cNvSpPr>
-          <p:nvPr>
-            <p:ph type="body" idx="3" sz="quarter"/>
-          </p:nvPr>
-        </p:nvSpPr>
-        <p:spPr/>
-        <p:txBody>
-          <a:bodyPr/>
-          <a:lstStyle/>
-          <a:p>
-            <a:r>
-              <a:t>If the group is large we run lightning rounds instead. Tell them to prepare the full five anyway: five cuts to two cleanly, two does not expand.</a:t>
-            </a:r>
-          </a:p>
-        </p:txBody>
-      </p:sp>
-      <p:sp>
-        <p:nvSpPr>
-          <p:cNvPr id="4" name="Slide Number Placeholder 3"/>
-          <p:cNvSpPr>
-            <a:spLocks noGrp="1"/>
-          </p:cNvSpPr>
-          <p:nvPr>
-            <p:ph type="sldNum" idx="5" sz="quarter"/>
-          </p:nvPr>
-        </p:nvSpPr>
-        <p:spPr/>
-      </p:sp>
-    </p:spTree>
-  </p:cSld>
-  <p:clrMapOvr>
-    <a:masterClrMapping/>
-  </p:clrMapOvr>
-</p:notes>
-</file>
-
-<file path=ppt/notesSlides/notesSlide17.xml><?xml version="1.0" encoding="utf-8"?>
-<p:notes xmlns:a="http://schemas.openxmlformats.org/drawingml/2006/main" xmlns:p="http://schemas.openxmlformats.org/presentationml/2006/main" xmlns:r="http://schemas.openxmlformats.org/officeDocument/2006/relationships">
-  <p:cSld>
-    <p:spTree>
-      <p:nvGrpSpPr>
-        <p:cNvPr id="1" name=""/>
-        <p:cNvGrpSpPr/>
-        <p:nvPr/>
-      </p:nvGrpSpPr>
-      <p:grpSpPr>
-        <a:xfrm>
-          <a:off x="0" y="0"/>
-          <a:ext cx="0" cy="0"/>
-          <a:chOff x="0" y="0"/>
-          <a:chExt cx="0" cy="0"/>
-        </a:xfrm>
-      </p:grpSpPr>
-      <p:sp>
-        <p:nvSpPr>
-          <p:cNvPr id="2" name="Slide Image Placeholder 1"/>
-          <p:cNvSpPr>
-            <a:spLocks noGrp="1"/>
-          </p:cNvSpPr>
-          <p:nvPr>
-            <p:ph type="sldImg" idx="2"/>
-          </p:nvPr>
-        </p:nvSpPr>
-        <p:spPr/>
-      </p:sp>
-      <p:sp>
-        <p:nvSpPr>
-          <p:cNvPr id="3" name="Notes Placeholder 2"/>
-          <p:cNvSpPr>
-            <a:spLocks noGrp="1"/>
-          </p:cNvSpPr>
-          <p:nvPr>
-            <p:ph type="body" idx="3" sz="quarter"/>
-          </p:nvPr>
-        </p:nvSpPr>
-        <p:spPr/>
-        <p:txBody>
-          <a:bodyPr/>
-          <a:lstStyle/>
-          <a:p>
-            <a:r>
-              <a:t>Improvising a number under pressure is the one unrecoverable mistake. Better to say you do not know and offer what you would need.</a:t>
-            </a:r>
-          </a:p>
-        </p:txBody>
-      </p:sp>
-      <p:sp>
-        <p:nvSpPr>
-          <p:cNvPr id="4" name="Slide Number Placeholder 3"/>
-          <p:cNvSpPr>
-            <a:spLocks noGrp="1"/>
-          </p:cNvSpPr>
-          <p:nvPr>
-            <p:ph type="sldNum" idx="5" sz="quarter"/>
-          </p:nvPr>
-        </p:nvSpPr>
-        <p:spPr/>
-      </p:sp>
-    </p:spTree>
-  </p:cSld>
-  <p:clrMapOvr>
-    <a:masterClrMapping/>
-  </p:clrMapOvr>
-</p:notes>
-</file>
-
-<file path=ppt/notesSlides/notesSlide18.xml><?xml version="1.0" encoding="utf-8"?>
-<p:notes xmlns:a="http://schemas.openxmlformats.org/drawingml/2006/main" xmlns:p="http://schemas.openxmlformats.org/presentationml/2006/main" xmlns:r="http://schemas.openxmlformats.org/officeDocument/2006/relationships">
-  <p:cSld>
-    <p:spTree>
-      <p:nvGrpSpPr>
-        <p:cNvPr id="1" name=""/>
-        <p:cNvGrpSpPr/>
-        <p:nvPr/>
-      </p:nvGrpSpPr>
-      <p:grpSpPr>
-        <a:xfrm>
-          <a:off x="0" y="0"/>
-          <a:ext cx="0" cy="0"/>
-          <a:chOff x="0" y="0"/>
-          <a:chExt cx="0" cy="0"/>
-        </a:xfrm>
-      </p:grpSpPr>
-      <p:sp>
-        <p:nvSpPr>
-          <p:cNvPr id="2" name="Slide Image Placeholder 1"/>
-          <p:cNvSpPr>
-            <a:spLocks noGrp="1"/>
-          </p:cNvSpPr>
-          <p:nvPr>
-            <p:ph type="sldImg" idx="2"/>
-          </p:nvPr>
-        </p:nvSpPr>
-        <p:spPr/>
-      </p:sp>
-      <p:sp>
-        <p:nvSpPr>
-          <p:cNvPr id="3" name="Notes Placeholder 2"/>
-          <p:cNvSpPr>
-            <a:spLocks noGrp="1"/>
-          </p:cNvSpPr>
-          <p:nvPr>
-            <p:ph type="body" idx="3" sz="quarter"/>
-          </p:nvPr>
-        </p:nvSpPr>
-        <p:spPr/>
-        <p:txBody>
-          <a:bodyPr/>
-          <a:lstStyle/>
-          <a:p>
-            <a:r>
-              <a:t>Close on the first takeaway. If they remember one thing from both sessions, it is that an analysis with no decision attached is a hobby.</a:t>
-            </a:r>
-          </a:p>
-        </p:txBody>
-      </p:sp>
-      <p:sp>
-        <p:nvSpPr>
-          <p:cNvPr id="4" name="Slide Number Placeholder 3"/>
-          <p:cNvSpPr>
-            <a:spLocks noGrp="1"/>
-          </p:cNvSpPr>
-          <p:nvPr>
-            <p:ph type="sldNum" idx="5" sz="quarter"/>
-          </p:nvPr>
-        </p:nvSpPr>
-        <p:spPr/>
-      </p:sp>
-    </p:spTree>
-  </p:cSld>
-  <p:clrMapOvr>
-    <a:masterClrMapping/>
-  </p:clrMapOvr>
-</p:notes>
-</file>
-
-<file path=ppt/notesSlides/notesSlide2.xml><?xml version="1.0" encoding="utf-8"?>
-<p:notes xmlns:a="http://schemas.openxmlformats.org/drawingml/2006/main" xmlns:p="http://schemas.openxmlformats.org/presentationml/2006/main" xmlns:r="http://schemas.openxmlformats.org/officeDocument/2006/relationships">
-  <p:cSld>
-    <p:spTree>
-      <p:nvGrpSpPr>
-        <p:cNvPr id="1" name=""/>
-        <p:cNvGrpSpPr/>
-        <p:nvPr/>
-      </p:nvGrpSpPr>
-      <p:grpSpPr>
-        <a:xfrm>
-          <a:off x="0" y="0"/>
-          <a:ext cx="0" cy="0"/>
-          <a:chOff x="0" y="0"/>
-          <a:chExt cx="0" cy="0"/>
-        </a:xfrm>
-      </p:grpSpPr>
-      <p:sp>
-        <p:nvSpPr>
-          <p:cNvPr id="2" name="Slide Image Placeholder 1"/>
-          <p:cNvSpPr>
-            <a:spLocks noGrp="1"/>
-          </p:cNvSpPr>
-          <p:nvPr>
-            <p:ph type="sldImg" idx="2"/>
-          </p:nvPr>
-        </p:nvSpPr>
-        <p:spPr/>
-      </p:sp>
-      <p:sp>
-        <p:nvSpPr>
-          <p:cNvPr id="3" name="Notes Placeholder 2"/>
-          <p:cNvSpPr>
-            <a:spLocks noGrp="1"/>
-          </p:cNvSpPr>
-          <p:nvPr>
-            <p:ph type="body" idx="3" sz="quarter"/>
-          </p:nvPr>
-        </p:nvSpPr>
-        <p:spPr/>
-        <p:txBody>
-          <a:bodyPr/>
-          <a:lstStyle/>
-          <a:p>
-            <a:r>
-              <a:t>Say the 6:00 line out loud. The instinct is to start building immediately and it is the wrong instinct.</a:t>
-            </a:r>
-          </a:p>
-        </p:txBody>
-      </p:sp>
-      <p:sp>
-        <p:nvSpPr>
-          <p:cNvPr id="4" name="Slide Number Placeholder 3"/>
-          <p:cNvSpPr>
-            <a:spLocks noGrp="1"/>
-          </p:cNvSpPr>
-          <p:nvPr>
-            <p:ph type="sldNum" idx="5" sz="quarter"/>
-          </p:nvPr>
-        </p:nvSpPr>
-        <p:spPr/>
-      </p:sp>
-    </p:spTree>
-  </p:cSld>
-  <p:clrMapOvr>
-    <a:masterClrMapping/>
-  </p:clrMapOvr>
-</p:notes>
-</file>
-
-<file path=ppt/notesSlides/notesSlide3.xml><?xml version="1.0" encoding="utf-8"?>
-<p:notes xmlns:a="http://schemas.openxmlformats.org/drawingml/2006/main" xmlns:p="http://schemas.openxmlformats.org/presentationml/2006/main" xmlns:r="http://schemas.openxmlformats.org/officeDocument/2006/relationships">
-  <p:cSld>
-    <p:spTree>
-      <p:nvGrpSpPr>
-        <p:cNvPr id="1" name=""/>
-        <p:cNvGrpSpPr/>
-        <p:nvPr/>
-      </p:nvGrpSpPr>
-      <p:grpSpPr>
-        <a:xfrm>
-          <a:off x="0" y="0"/>
-          <a:ext cx="0" cy="0"/>
-          <a:chOff x="0" y="0"/>
-          <a:chExt cx="0" cy="0"/>
-        </a:xfrm>
-      </p:grpSpPr>
-      <p:sp>
-        <p:nvSpPr>
-          <p:cNvPr id="2" name="Slide Image Placeholder 1"/>
-          <p:cNvSpPr>
-            <a:spLocks noGrp="1"/>
-          </p:cNvSpPr>
-          <p:nvPr>
-            <p:ph type="sldImg" idx="2"/>
-          </p:nvPr>
-        </p:nvSpPr>
-        <p:spPr/>
-      </p:sp>
-      <p:sp>
-        <p:nvSpPr>
-          <p:cNvPr id="3" name="Notes Placeholder 2"/>
-          <p:cNvSpPr>
-            <a:spLocks noGrp="1"/>
-          </p:cNvSpPr>
-          <p:nvPr>
-            <p:ph type="body" idx="3" sz="quarter"/>
-          </p:nvPr>
-        </p:nvSpPr>
-        <p:spPr/>
-        <p:txBody>
-          <a:bodyPr/>
-          <a:lstStyle/>
-          <a:p>
-            <a:r>
-              <a:t>Assume two or three people missed session 1 or came unprepared. Name the recovery path early so nobody sits stuck for twenty minutes.</a:t>
-            </a:r>
-          </a:p>
-        </p:txBody>
-      </p:sp>
-      <p:sp>
-        <p:nvSpPr>
-          <p:cNvPr id="4" name="Slide Number Placeholder 3"/>
-          <p:cNvSpPr>
-            <a:spLocks noGrp="1"/>
-          </p:cNvSpPr>
-          <p:nvPr>
-            <p:ph type="sldNum" idx="5" sz="quarter"/>
-          </p:nvPr>
-        </p:nvSpPr>
-        <p:spPr/>
-      </p:sp>
-    </p:spTree>
-  </p:cSld>
-  <p:clrMapOvr>
-    <a:masterClrMapping/>
-  </p:clrMapOvr>
-</p:notes>
-</file>
-
-<file path=ppt/notesSlides/notesSlide4.xml><?xml version="1.0" encoding="utf-8"?>
-<p:notes xmlns:a="http://schemas.openxmlformats.org/drawingml/2006/main" xmlns:p="http://schemas.openxmlformats.org/presentationml/2006/main" xmlns:r="http://schemas.openxmlformats.org/officeDocument/2006/relationships">
-  <p:cSld>
-    <p:spTree>
-      <p:nvGrpSpPr>
-        <p:cNvPr id="1" name=""/>
-        <p:cNvGrpSpPr/>
-        <p:nvPr/>
-      </p:nvGrpSpPr>
-      <p:grpSpPr>
-        <a:xfrm>
-          <a:off x="0" y="0"/>
-          <a:ext cx="0" cy="0"/>
-          <a:chOff x="0" y="0"/>
-          <a:chExt cx="0" cy="0"/>
-        </a:xfrm>
-      </p:grpSpPr>
-      <p:sp>
-        <p:nvSpPr>
-          <p:cNvPr id="2" name="Slide Image Placeholder 1"/>
-          <p:cNvSpPr>
-            <a:spLocks noGrp="1"/>
-          </p:cNvSpPr>
-          <p:nvPr>
-            <p:ph type="sldImg" idx="2"/>
-          </p:nvPr>
-        </p:nvSpPr>
-        <p:spPr/>
-      </p:sp>
-      <p:sp>
-        <p:nvSpPr>
-          <p:cNvPr id="3" name="Notes Placeholder 2"/>
-          <p:cNvSpPr>
-            <a:spLocks noGrp="1"/>
-          </p:cNvSpPr>
-          <p:nvPr>
-            <p:ph type="body" idx="3" sz="quarter"/>
-          </p:nvPr>
-        </p:nvSpPr>
-        <p:spPr/>
-        <p:txBody>
-          <a:bodyPr/>
-          <a:lstStyle/>
-          <a:p>
-            <a:r>
-              <a:t>The module tags are the callback to last week. Reinforce that they are not learning new statistics tonight, they are aiming what they already know.</a:t>
-            </a:r>
-          </a:p>
-        </p:txBody>
-      </p:sp>
-      <p:sp>
-        <p:nvSpPr>
-          <p:cNvPr id="4" name="Slide Number Placeholder 3"/>
-          <p:cNvSpPr>
-            <a:spLocks noGrp="1"/>
-          </p:cNvSpPr>
-          <p:nvPr>
-            <p:ph type="sldNum" idx="5" sz="quarter"/>
-          </p:nvPr>
-        </p:nvSpPr>
-        <p:spPr/>
-      </p:sp>
-    </p:spTree>
-  </p:cSld>
-  <p:clrMapOvr>
-    <a:masterClrMapping/>
-  </p:clrMapOvr>
-</p:notes>
-</file>
-
-<file path=ppt/notesSlides/notesSlide5.xml><?xml version="1.0" encoding="utf-8"?>
-<p:notes xmlns:a="http://schemas.openxmlformats.org/drawingml/2006/main" xmlns:p="http://schemas.openxmlformats.org/presentationml/2006/main" xmlns:r="http://schemas.openxmlformats.org/officeDocument/2006/relationships">
-  <p:cSld>
-    <p:spTree>
-      <p:nvGrpSpPr>
-        <p:cNvPr id="1" name=""/>
-        <p:cNvGrpSpPr/>
-        <p:nvPr/>
-      </p:nvGrpSpPr>
-      <p:grpSpPr>
-        <a:xfrm>
-          <a:off x="0" y="0"/>
-          <a:ext cx="0" cy="0"/>
-          <a:chOff x="0" y="0"/>
-          <a:chExt cx="0" cy="0"/>
-        </a:xfrm>
-      </p:grpSpPr>
-      <p:sp>
-        <p:nvSpPr>
-          <p:cNvPr id="2" name="Slide Image Placeholder 1"/>
-          <p:cNvSpPr>
-            <a:spLocks noGrp="1"/>
-          </p:cNvSpPr>
-          <p:nvPr>
-            <p:ph type="sldImg" idx="2"/>
-          </p:nvPr>
-        </p:nvSpPr>
-        <p:spPr/>
-      </p:sp>
-      <p:sp>
-        <p:nvSpPr>
-          <p:cNvPr id="3" name="Notes Placeholder 2"/>
-          <p:cNvSpPr>
-            <a:spLocks noGrp="1"/>
-          </p:cNvSpPr>
-          <p:nvPr>
-            <p:ph type="body" idx="3" sz="quarter"/>
-          </p:nvPr>
-        </p:nvSpPr>
-        <p:spPr/>
-        <p:txBody>
-          <a:bodyPr/>
-          <a:lstStyle/>
-          <a:p>
-            <a:r>
-              <a:t>Make them physically write the NOT list. It is the highest-value thirty seconds of the session.</a:t>
-            </a:r>
-          </a:p>
-        </p:txBody>
-      </p:sp>
-      <p:sp>
-        <p:nvSpPr>
-          <p:cNvPr id="4" name="Slide Number Placeholder 3"/>
-          <p:cNvSpPr>
-            <a:spLocks noGrp="1"/>
-          </p:cNvSpPr>
-          <p:nvPr>
-            <p:ph type="sldNum" idx="5" sz="quarter"/>
-          </p:nvPr>
-        </p:nvSpPr>
-        <p:spPr/>
-      </p:sp>
-    </p:spTree>
-  </p:cSld>
-  <p:clrMapOvr>
-    <a:masterClrMapping/>
-  </p:clrMapOvr>
-</p:notes>
-</file>
-
-<file path=ppt/notesSlides/notesSlide6.xml><?xml version="1.0" encoding="utf-8"?>
-<p:notes xmlns:a="http://schemas.openxmlformats.org/drawingml/2006/main" xmlns:p="http://schemas.openxmlformats.org/presentationml/2006/main" xmlns:r="http://schemas.openxmlformats.org/officeDocument/2006/relationships">
-  <p:cSld>
-    <p:spTree>
-      <p:nvGrpSpPr>
-        <p:cNvPr id="1" name=""/>
-        <p:cNvGrpSpPr/>
-        <p:nvPr/>
-      </p:nvGrpSpPr>
-      <p:grpSpPr>
-        <a:xfrm>
-          <a:off x="0" y="0"/>
-          <a:ext cx="0" cy="0"/>
-          <a:chOff x="0" y="0"/>
-          <a:chExt cx="0" cy="0"/>
-        </a:xfrm>
-      </p:grpSpPr>
-      <p:sp>
-        <p:nvSpPr>
-          <p:cNvPr id="2" name="Slide Image Placeholder 1"/>
-          <p:cNvSpPr>
-            <a:spLocks noGrp="1"/>
-          </p:cNvSpPr>
-          <p:nvPr>
-            <p:ph type="sldImg" idx="2"/>
-          </p:nvPr>
-        </p:nvSpPr>
-        <p:spPr/>
-      </p:sp>
-      <p:sp>
-        <p:nvSpPr>
-          <p:cNvPr id="3" name="Notes Placeholder 2"/>
-          <p:cNvSpPr>
-            <a:spLocks noGrp="1"/>
-          </p:cNvSpPr>
-          <p:nvPr>
-            <p:ph type="body" idx="3" sz="quarter"/>
-          </p:nvPr>
-        </p:nvSpPr>
-        <p:spPr/>
-        <p:txBody>
-          <a:bodyPr/>
-          <a:lstStyle/>
-          <a:p>
-            <a:r>
-              <a:t>For a lot of this room the honest answer is Excel, and they will feel like that is the boring choice. Tell them it is the professional one.</a:t>
-            </a:r>
-          </a:p>
-        </p:txBody>
-      </p:sp>
-      <p:sp>
-        <p:nvSpPr>
-          <p:cNvPr id="4" name="Slide Number Placeholder 3"/>
-          <p:cNvSpPr>
-            <a:spLocks noGrp="1"/>
-          </p:cNvSpPr>
-          <p:nvPr>
-            <p:ph type="sldNum" idx="5" sz="quarter"/>
-          </p:nvPr>
-        </p:nvSpPr>
-        <p:spPr/>
-      </p:sp>
-    </p:spTree>
-  </p:cSld>
-  <p:clrMapOvr>
-    <a:masterClrMapping/>
-  </p:clrMapOvr>
-</p:notes>
-</file>
-
-<file path=ppt/notesSlides/notesSlide7.xml><?xml version="1.0" encoding="utf-8"?>
-<p:notes xmlns:a="http://schemas.openxmlformats.org/drawingml/2006/main" xmlns:p="http://schemas.openxmlformats.org/presentationml/2006/main" xmlns:r="http://schemas.openxmlformats.org/officeDocument/2006/relationships">
-  <p:cSld>
-    <p:spTree>
-      <p:nvGrpSpPr>
-        <p:cNvPr id="1" name=""/>
-        <p:cNvGrpSpPr/>
-        <p:nvPr/>
-      </p:nvGrpSpPr>
-      <p:grpSpPr>
-        <a:xfrm>
-          <a:off x="0" y="0"/>
-          <a:ext cx="0" cy="0"/>
-          <a:chOff x="0" y="0"/>
-          <a:chExt cx="0" cy="0"/>
-        </a:xfrm>
-      </p:grpSpPr>
-      <p:sp>
-        <p:nvSpPr>
-          <p:cNvPr id="2" name="Slide Image Placeholder 1"/>
-          <p:cNvSpPr>
-            <a:spLocks noGrp="1"/>
-          </p:cNvSpPr>
-          <p:nvPr>
-            <p:ph type="sldImg" idx="2"/>
-          </p:nvPr>
-        </p:nvSpPr>
-        <p:spPr/>
-      </p:sp>
-      <p:sp>
-        <p:nvSpPr>
-          <p:cNvPr id="3" name="Notes Placeholder 2"/>
-          <p:cNvSpPr>
-            <a:spLocks noGrp="1"/>
-          </p:cNvSpPr>
-          <p:nvPr>
-            <p:ph type="body" idx="3" sz="quarter"/>
-          </p:nvPr>
-        </p:nvSpPr>
-        <p:spPr/>
-        <p:txBody>
-          <a:bodyPr/>
-          <a:lstStyle/>
-          <a:p>
-            <a:r>
-              <a:t>This is the thesis of the whole session. The range is not a hedge, it is the finding.</a:t>
-            </a:r>
-          </a:p>
-        </p:txBody>
-      </p:sp>
-      <p:sp>
-        <p:nvSpPr>
-          <p:cNvPr id="4" name="Slide Number Placeholder 3"/>
-          <p:cNvSpPr>
-            <a:spLocks noGrp="1"/>
-          </p:cNvSpPr>
-          <p:nvPr>
-            <p:ph type="sldNum" idx="5" sz="quarter"/>
-          </p:nvPr>
-        </p:nvSpPr>
-        <p:spPr/>
-      </p:sp>
-    </p:spTree>
-  </p:cSld>
-  <p:clrMapOvr>
-    <a:masterClrMapping/>
-  </p:clrMapOvr>
-</p:notes>
-</file>
-
-<file path=ppt/notesSlides/notesSlide8.xml><?xml version="1.0" encoding="utf-8"?>
-<p:notes xmlns:a="http://schemas.openxmlformats.org/drawingml/2006/main" xmlns:p="http://schemas.openxmlformats.org/presentationml/2006/main" xmlns:r="http://schemas.openxmlformats.org/officeDocument/2006/relationships">
-  <p:cSld>
-    <p:spTree>
-      <p:nvGrpSpPr>
-        <p:cNvPr id="1" name=""/>
-        <p:cNvGrpSpPr/>
-        <p:nvPr/>
-      </p:nvGrpSpPr>
-      <p:grpSpPr>
-        <a:xfrm>
-          <a:off x="0" y="0"/>
-          <a:ext cx="0" cy="0"/>
-          <a:chOff x="0" y="0"/>
-          <a:chExt cx="0" cy="0"/>
-        </a:xfrm>
-      </p:grpSpPr>
-      <p:sp>
-        <p:nvSpPr>
-          <p:cNvPr id="2" name="Slide Image Placeholder 1"/>
-          <p:cNvSpPr>
-            <a:spLocks noGrp="1"/>
-          </p:cNvSpPr>
-          <p:nvPr>
-            <p:ph type="sldImg" idx="2"/>
-          </p:nvPr>
-        </p:nvSpPr>
-        <p:spPr/>
-      </p:sp>
-      <p:sp>
-        <p:nvSpPr>
-          <p:cNvPr id="3" name="Notes Placeholder 2"/>
-          <p:cNvSpPr>
-            <a:spLocks noGrp="1"/>
-          </p:cNvSpPr>
-          <p:nvPr>
-            <p:ph type="body" idx="3" sz="quarter"/>
-          </p:nvPr>
-        </p:nvSpPr>
-        <p:spPr/>
-        <p:txBody>
-          <a:bodyPr/>
-          <a:lstStyle/>
-          <a:p>
-            <a:r>
-              <a:t>Ask whether anyone caught the model agreeing with them last week. Someone always has.</a:t>
-            </a:r>
-          </a:p>
-        </p:txBody>
-      </p:sp>
-      <p:sp>
-        <p:nvSpPr>
-          <p:cNvPr id="4" name="Slide Number Placeholder 3"/>
-          <p:cNvSpPr>
-            <a:spLocks noGrp="1"/>
-          </p:cNvSpPr>
-          <p:nvPr>
-            <p:ph type="sldNum" idx="5" sz="quarter"/>
-          </p:nvPr>
-        </p:nvSpPr>
-        <p:spPr/>
-      </p:sp>
-    </p:spTree>
-  </p:cSld>
-  <p:clrMapOvr>
-    <a:masterClrMapping/>
-  </p:clrMapOvr>
-</p:notes>
-</file>
-
-<file path=ppt/notesSlides/notesSlide9.xml><?xml version="1.0" encoding="utf-8"?>
-<p:notes xmlns:a="http://schemas.openxmlformats.org/drawingml/2006/main" xmlns:p="http://schemas.openxmlformats.org/presentationml/2006/main" xmlns:r="http://schemas.openxmlformats.org/officeDocument/2006/relationships">
-  <p:cSld>
-    <p:spTree>
-      <p:nvGrpSpPr>
-        <p:cNvPr id="1" name=""/>
-        <p:cNvGrpSpPr/>
-        <p:nvPr/>
-      </p:nvGrpSpPr>
-      <p:grpSpPr>
-        <a:xfrm>
-          <a:off x="0" y="0"/>
-          <a:ext cx="0" cy="0"/>
-          <a:chOff x="0" y="0"/>
-          <a:chExt cx="0" cy="0"/>
-        </a:xfrm>
-      </p:grpSpPr>
-      <p:sp>
-        <p:nvSpPr>
-          <p:cNvPr id="2" name="Slide Image Placeholder 1"/>
-          <p:cNvSpPr>
-            <a:spLocks noGrp="1"/>
-          </p:cNvSpPr>
-          <p:nvPr>
-            <p:ph type="sldImg" idx="2"/>
-          </p:nvPr>
-        </p:nvSpPr>
-        <p:spPr/>
-      </p:sp>
-      <p:sp>
-        <p:nvSpPr>
-          <p:cNvPr id="3" name="Notes Placeholder 2"/>
-          <p:cNvSpPr>
-            <a:spLocks noGrp="1"/>
-          </p:cNvSpPr>
-          <p:nvPr>
-            <p:ph type="body" idx="3" sz="quarter"/>
-          </p:nvPr>
-        </p:nvSpPr>
-        <p:spPr/>
-        <p:txBody>
-          <a:bodyPr/>
-          <a:lstStyle/>
-          <a:p>
-            <a:r>
-              <a:t>Circulate hard for the first fifteen minutes. The common failure is building three things badly instead of one thing well.</a:t>
-            </a:r>
-          </a:p>
-        </p:txBody>
-      </p:sp>
-      <p:sp>
-        <p:nvSpPr>
-          <p:cNvPr id="4" name="Slide Number Placeholder 3"/>
-          <p:cNvSpPr>
-            <a:spLocks noGrp="1"/>
-          </p:cNvSpPr>
-          <p:nvPr>
-            <p:ph type="sldNum" idx="5" sz="quarter"/>
-          </p:nvPr>
-        </p:nvSpPr>
-        <p:spPr/>
-      </p:sp>
-    </p:spTree>
-  </p:cSld>
-  <p:clrMapOvr>
-    <a:masterClrMapping/>
-  </p:clrMapOvr>
-</p:notes>
 </file>
 
 <file path=ppt/slideLayouts/slideLayout1.xml><?xml version="1.0" encoding="utf-8"?>
